--- a/docs/entrega/pitch/PITCH_AI_GLASSES_BRASIL.pptx
+++ b/docs/entrega/pitch/PITCH_AI_GLASSES_BRASIL.pptx
@@ -1847,7 +1847,7 @@
         </p:nvSpPr>
         <p:spPr>
           <a:xfrm>
-            <a:off x="685800" y="6291072"/>
+            <a:off x="685800" y="6181344"/>
             <a:ext cx="4206240" cy="228600"/>
           </a:xfrm>
           <a:prstGeom prst="rect">
@@ -1875,6 +1875,54 @@
               <a:t>Assistente de Prontuário Automático</a:t>
             </a:r>
             <a:endParaRPr lang="en-US" sz="900" dirty="0"/>
+          </a:p>
+        </p:txBody>
+      </p:sp>
+      <p:sp>
+        <p:nvSpPr>
+          <p:cNvPr id="12" name="Text 9">
+            <a:hlinkClick r:id="rId2" tooltip=""/>
+          </p:cNvPr>
+          <p:cNvSpPr/>
+          <p:nvPr/>
+        </p:nvSpPr>
+        <p:spPr>
+          <a:xfrm>
+            <a:off x="685800" y="6419088"/>
+            <a:ext cx="4480560" cy="164592"/>
+          </a:xfrm>
+          <a:prstGeom prst="rect">
+            <a:avLst/>
+          </a:prstGeom>
+          <a:noFill/>
+          <a:ln/>
+        </p:spPr>
+        <p:txBody>
+          <a:bodyPr wrap="square" lIns="0" tIns="0" rIns="0" bIns="0" rtlCol="0" anchor="ctr"/>
+          <a:lstStyle/>
+          <a:p>
+            <a:pPr indent="0" marL="0">
+              <a:buNone/>
+            </a:pPr>
+            <a:r>
+              <a:rPr lang="en-US" sz="750" u="sng" dirty="0">
+                <a:solidFill>
+                  <a:srgbClr val="C8E662"/>
+                </a:solidFill>
+                <a:latin typeface="Aptos" pitchFamily="34" charset="0"/>
+                <a:ea typeface="Aptos" pitchFamily="34" charset="-122"/>
+                <a:cs typeface="Aptos" pitchFamily="34" charset="-120"/>
+                <a:hlinkClick r:id="rId2" invalidUrl="" action="" tgtFrame="" tooltip="" history="1" highlightClick="0" endSnd="0">
+                  <a:extLst>
+                    <a:ext uri="{A12FA001-AC4F-418D-AE19-62706E023703}">
+                      <ahyp:hlinkClr xmlns:ahyp="http://schemas.microsoft.com/office/drawing/2018/hyperlinkcolor" val="tx"/>
+                    </a:ext>
+                  </a:extLst>
+                </a:hlinkClick>
+              </a:rPr>
+              <a:t>github.com/marcospaulo429/meta-glasses</a:t>
+            </a:r>
+            <a:endParaRPr lang="en-US" sz="750" dirty="0"/>
           </a:p>
         </p:txBody>
       </p:sp>
@@ -2603,7 +2651,7 @@
         <p:spPr>
           <a:xfrm>
             <a:off x="594360" y="6428232"/>
-            <a:ext cx="9875520" cy="164592"/>
+            <a:ext cx="5394960" cy="164592"/>
           </a:xfrm>
           <a:prstGeom prst="rect">
             <a:avLst/>
@@ -2628,6 +2676,54 @@
                 <a:cs typeface="Aptos" pitchFamily="34" charset="-120"/>
               </a:rPr>
               <a:t>Assistente de Prontuário Automático · AI Glasses Brasil 2026</a:t>
+            </a:r>
+            <a:endParaRPr lang="en-US" sz="750" dirty="0"/>
+          </a:p>
+        </p:txBody>
+      </p:sp>
+      <p:sp>
+        <p:nvSpPr>
+          <p:cNvPr id="22" name="Text 20">
+            <a:hlinkClick r:id="rId1" tooltip=""/>
+          </p:cNvPr>
+          <p:cNvSpPr/>
+          <p:nvPr/>
+        </p:nvSpPr>
+        <p:spPr>
+          <a:xfrm>
+            <a:off x="6080760" y="6428232"/>
+            <a:ext cx="4983480" cy="164592"/>
+          </a:xfrm>
+          <a:prstGeom prst="rect">
+            <a:avLst/>
+          </a:prstGeom>
+          <a:noFill/>
+          <a:ln/>
+        </p:spPr>
+        <p:txBody>
+          <a:bodyPr wrap="square" lIns="0" tIns="0" rIns="0" bIns="0" rtlCol="0" anchor="ctr"/>
+          <a:lstStyle/>
+          <a:p>
+            <a:pPr algn="r" indent="0" marL="0">
+              <a:buNone/>
+            </a:pPr>
+            <a:r>
+              <a:rPr lang="en-US" sz="750" u="sng" dirty="0">
+                <a:solidFill>
+                  <a:srgbClr val="0E604B"/>
+                </a:solidFill>
+                <a:latin typeface="Aptos" pitchFamily="34" charset="0"/>
+                <a:ea typeface="Aptos" pitchFamily="34" charset="-122"/>
+                <a:cs typeface="Aptos" pitchFamily="34" charset="-120"/>
+                <a:hlinkClick r:id="rId1" invalidUrl="" action="" tgtFrame="" tooltip="" history="1" highlightClick="0" endSnd="0">
+                  <a:extLst>
+                    <a:ext uri="{A12FA001-AC4F-418D-AE19-62706E023703}">
+                      <ahyp:hlinkClr xmlns:ahyp="http://schemas.microsoft.com/office/drawing/2018/hyperlinkcolor" val="tx"/>
+                    </a:ext>
+                  </a:extLst>
+                </a:hlinkClick>
+              </a:rPr>
+              <a:t>github.com/marcospaulo429/meta-glasses</a:t>
             </a:r>
             <a:endParaRPr lang="en-US" sz="750" dirty="0"/>
           </a:p>
@@ -3424,7 +3520,7 @@
         <p:spPr>
           <a:xfrm>
             <a:off x="594360" y="6428232"/>
-            <a:ext cx="9875520" cy="164592"/>
+            <a:ext cx="5394960" cy="164592"/>
           </a:xfrm>
           <a:prstGeom prst="rect">
             <a:avLst/>
@@ -3449,6 +3545,54 @@
                 <a:cs typeface="Aptos" pitchFamily="34" charset="-120"/>
               </a:rPr>
               <a:t>Assistente de Prontuário Automático · AI Glasses Brasil 2026</a:t>
+            </a:r>
+            <a:endParaRPr lang="en-US" sz="750" dirty="0"/>
+          </a:p>
+        </p:txBody>
+      </p:sp>
+      <p:sp>
+        <p:nvSpPr>
+          <p:cNvPr id="23" name="Text 21">
+            <a:hlinkClick r:id="rId1" tooltip=""/>
+          </p:cNvPr>
+          <p:cNvSpPr/>
+          <p:nvPr/>
+        </p:nvSpPr>
+        <p:spPr>
+          <a:xfrm>
+            <a:off x="6080760" y="6428232"/>
+            <a:ext cx="4983480" cy="164592"/>
+          </a:xfrm>
+          <a:prstGeom prst="rect">
+            <a:avLst/>
+          </a:prstGeom>
+          <a:noFill/>
+          <a:ln/>
+        </p:spPr>
+        <p:txBody>
+          <a:bodyPr wrap="square" lIns="0" tIns="0" rIns="0" bIns="0" rtlCol="0" anchor="ctr"/>
+          <a:lstStyle/>
+          <a:p>
+            <a:pPr algn="r" indent="0" marL="0">
+              <a:buNone/>
+            </a:pPr>
+            <a:r>
+              <a:rPr lang="en-US" sz="750" u="sng" dirty="0">
+                <a:solidFill>
+                  <a:srgbClr val="0E604B"/>
+                </a:solidFill>
+                <a:latin typeface="Aptos" pitchFamily="34" charset="0"/>
+                <a:ea typeface="Aptos" pitchFamily="34" charset="-122"/>
+                <a:cs typeface="Aptos" pitchFamily="34" charset="-120"/>
+                <a:hlinkClick r:id="rId1" invalidUrl="" action="" tgtFrame="" tooltip="" history="1" highlightClick="0" endSnd="0">
+                  <a:extLst>
+                    <a:ext uri="{A12FA001-AC4F-418D-AE19-62706E023703}">
+                      <ahyp:hlinkClr xmlns:ahyp="http://schemas.microsoft.com/office/drawing/2018/hyperlinkcolor" val="tx"/>
+                    </a:ext>
+                  </a:extLst>
+                </a:hlinkClick>
+              </a:rPr>
+              <a:t>github.com/marcospaulo429/meta-glasses</a:t>
             </a:r>
             <a:endParaRPr lang="en-US" sz="750" dirty="0"/>
           </a:p>
@@ -4664,7 +4808,7 @@
         <p:spPr>
           <a:xfrm>
             <a:off x="594360" y="6428232"/>
-            <a:ext cx="9875520" cy="164592"/>
+            <a:ext cx="5394960" cy="164592"/>
           </a:xfrm>
           <a:prstGeom prst="rect">
             <a:avLst/>
@@ -4689,6 +4833,54 @@
                 <a:cs typeface="Aptos" pitchFamily="34" charset="-120"/>
               </a:rPr>
               <a:t>Assistente de Prontuário Automático · AI Glasses Brasil 2026</a:t>
+            </a:r>
+            <a:endParaRPr lang="en-US" sz="750" dirty="0"/>
+          </a:p>
+        </p:txBody>
+      </p:sp>
+      <p:sp>
+        <p:nvSpPr>
+          <p:cNvPr id="37" name="Text 35">
+            <a:hlinkClick r:id="rId1" tooltip=""/>
+          </p:cNvPr>
+          <p:cNvSpPr/>
+          <p:nvPr/>
+        </p:nvSpPr>
+        <p:spPr>
+          <a:xfrm>
+            <a:off x="6080760" y="6428232"/>
+            <a:ext cx="4983480" cy="164592"/>
+          </a:xfrm>
+          <a:prstGeom prst="rect">
+            <a:avLst/>
+          </a:prstGeom>
+          <a:noFill/>
+          <a:ln/>
+        </p:spPr>
+        <p:txBody>
+          <a:bodyPr wrap="square" lIns="0" tIns="0" rIns="0" bIns="0" rtlCol="0" anchor="ctr"/>
+          <a:lstStyle/>
+          <a:p>
+            <a:pPr algn="r" indent="0" marL="0">
+              <a:buNone/>
+            </a:pPr>
+            <a:r>
+              <a:rPr lang="en-US" sz="750" u="sng" dirty="0">
+                <a:solidFill>
+                  <a:srgbClr val="0E604B"/>
+                </a:solidFill>
+                <a:latin typeface="Aptos" pitchFamily="34" charset="0"/>
+                <a:ea typeface="Aptos" pitchFamily="34" charset="-122"/>
+                <a:cs typeface="Aptos" pitchFamily="34" charset="-120"/>
+                <a:hlinkClick r:id="rId1" invalidUrl="" action="" tgtFrame="" tooltip="" history="1" highlightClick="0" endSnd="0">
+                  <a:extLst>
+                    <a:ext uri="{A12FA001-AC4F-418D-AE19-62706E023703}">
+                      <ahyp:hlinkClr xmlns:ahyp="http://schemas.microsoft.com/office/drawing/2018/hyperlinkcolor" val="tx"/>
+                    </a:ext>
+                  </a:extLst>
+                </a:hlinkClick>
+              </a:rPr>
+              <a:t>github.com/marcospaulo429/meta-glasses</a:t>
             </a:r>
             <a:endParaRPr lang="en-US" sz="750" dirty="0"/>
           </a:p>
@@ -5772,7 +5964,7 @@
         <p:spPr>
           <a:xfrm>
             <a:off x="594360" y="6428232"/>
-            <a:ext cx="9875520" cy="164592"/>
+            <a:ext cx="5394960" cy="164592"/>
           </a:xfrm>
           <a:prstGeom prst="rect">
             <a:avLst/>
@@ -5797,6 +5989,54 @@
                 <a:cs typeface="Aptos" pitchFamily="34" charset="-120"/>
               </a:rPr>
               <a:t>Fluxo completo entregue em arquitetura.png + arquitetura.mmd</a:t>
+            </a:r>
+            <a:endParaRPr lang="en-US" sz="750" dirty="0"/>
+          </a:p>
+        </p:txBody>
+      </p:sp>
+      <p:sp>
+        <p:nvSpPr>
+          <p:cNvPr id="33" name="Text 31">
+            <a:hlinkClick r:id="rId1" tooltip=""/>
+          </p:cNvPr>
+          <p:cNvSpPr/>
+          <p:nvPr/>
+        </p:nvSpPr>
+        <p:spPr>
+          <a:xfrm>
+            <a:off x="6080760" y="6428232"/>
+            <a:ext cx="4983480" cy="164592"/>
+          </a:xfrm>
+          <a:prstGeom prst="rect">
+            <a:avLst/>
+          </a:prstGeom>
+          <a:noFill/>
+          <a:ln/>
+        </p:spPr>
+        <p:txBody>
+          <a:bodyPr wrap="square" lIns="0" tIns="0" rIns="0" bIns="0" rtlCol="0" anchor="ctr"/>
+          <a:lstStyle/>
+          <a:p>
+            <a:pPr algn="r" indent="0" marL="0">
+              <a:buNone/>
+            </a:pPr>
+            <a:r>
+              <a:rPr lang="en-US" sz="750" u="sng" dirty="0">
+                <a:solidFill>
+                  <a:srgbClr val="0E604B"/>
+                </a:solidFill>
+                <a:latin typeface="Aptos" pitchFamily="34" charset="0"/>
+                <a:ea typeface="Aptos" pitchFamily="34" charset="-122"/>
+                <a:cs typeface="Aptos" pitchFamily="34" charset="-120"/>
+                <a:hlinkClick r:id="rId1" invalidUrl="" action="" tgtFrame="" tooltip="" history="1" highlightClick="0" endSnd="0">
+                  <a:extLst>
+                    <a:ext uri="{A12FA001-AC4F-418D-AE19-62706E023703}">
+                      <ahyp:hlinkClr xmlns:ahyp="http://schemas.microsoft.com/office/drawing/2018/hyperlinkcolor" val="tx"/>
+                    </a:ext>
+                  </a:extLst>
+                </a:hlinkClick>
+              </a:rPr>
+              <a:t>github.com/marcospaulo429/meta-glasses</a:t>
             </a:r>
             <a:endParaRPr lang="en-US" sz="750" dirty="0"/>
           </a:p>
@@ -6700,7 +6940,7 @@
         <p:spPr>
           <a:xfrm>
             <a:off x="594360" y="6428232"/>
-            <a:ext cx="9875520" cy="164592"/>
+            <a:ext cx="5394960" cy="164592"/>
           </a:xfrm>
           <a:prstGeom prst="rect">
             <a:avLst/>
@@ -6725,6 +6965,54 @@
                 <a:cs typeface="Aptos" pitchFamily="34" charset="-120"/>
               </a:rPr>
               <a:t>Assistente de Prontuário Automático · AI Glasses Brasil 2026</a:t>
+            </a:r>
+            <a:endParaRPr lang="en-US" sz="750" dirty="0"/>
+          </a:p>
+        </p:txBody>
+      </p:sp>
+      <p:sp>
+        <p:nvSpPr>
+          <p:cNvPr id="26" name="Text 24">
+            <a:hlinkClick r:id="rId1" tooltip=""/>
+          </p:cNvPr>
+          <p:cNvSpPr/>
+          <p:nvPr/>
+        </p:nvSpPr>
+        <p:spPr>
+          <a:xfrm>
+            <a:off x="6080760" y="6428232"/>
+            <a:ext cx="4983480" cy="164592"/>
+          </a:xfrm>
+          <a:prstGeom prst="rect">
+            <a:avLst/>
+          </a:prstGeom>
+          <a:noFill/>
+          <a:ln/>
+        </p:spPr>
+        <p:txBody>
+          <a:bodyPr wrap="square" lIns="0" tIns="0" rIns="0" bIns="0" rtlCol="0" anchor="ctr"/>
+          <a:lstStyle/>
+          <a:p>
+            <a:pPr algn="r" indent="0" marL="0">
+              <a:buNone/>
+            </a:pPr>
+            <a:r>
+              <a:rPr lang="en-US" sz="750" u="sng" dirty="0">
+                <a:solidFill>
+                  <a:srgbClr val="0E604B"/>
+                </a:solidFill>
+                <a:latin typeface="Aptos" pitchFamily="34" charset="0"/>
+                <a:ea typeface="Aptos" pitchFamily="34" charset="-122"/>
+                <a:cs typeface="Aptos" pitchFamily="34" charset="-120"/>
+                <a:hlinkClick r:id="rId1" invalidUrl="" action="" tgtFrame="" tooltip="" history="1" highlightClick="0" endSnd="0">
+                  <a:extLst>
+                    <a:ext uri="{A12FA001-AC4F-418D-AE19-62706E023703}">
+                      <ahyp:hlinkClr xmlns:ahyp="http://schemas.microsoft.com/office/drawing/2018/hyperlinkcolor" val="tx"/>
+                    </a:ext>
+                  </a:extLst>
+                </a:hlinkClick>
+              </a:rPr>
+              <a:t>github.com/marcospaulo429/meta-glasses</a:t>
             </a:r>
             <a:endParaRPr lang="en-US" sz="750" dirty="0"/>
           </a:p>

--- a/docs/entrega/pitch/PITCH_AI_GLASSES_BRASIL.pptx
+++ b/docs/entrega/pitch/PITCH_AI_GLASSES_BRASIL.pptx
@@ -598,8 +598,8 @@
             <a:r>
               <a:rPr lang="en-US" dirty="0"/>
               <a:t>Não queríamos assumir que um estudo internacional representava a rotina brasileira.
-Por isso conversamos com médicos reais.
-Substituir este trecho pelos achados e por uma citação verdadeira antes de gravar.</a:t>
+O Dr. Ranieri resumiu a tensão central: o prontuário deveria registrar a consulta, não interrompê-la.
+A próxima rodada de entrevistas mede tempo, contato visual, confiança e os principais receios.</a:t>
             </a:r>
             <a:endParaRPr lang="en-US" dirty="0"/>
           </a:p>
@@ -2064,7 +2064,7 @@
                 <a:ea typeface="Aptos" pitchFamily="34" charset="-122"/>
                 <a:cs typeface="Aptos" pitchFamily="34" charset="-120"/>
               </a:rPr>
-              <a:t>Substituir os campos destacados após ouvir médicos reais — sem inventar estatística.</a:t>
+              <a:t>Uma escuta inicial e quatro perguntas para orientar a validação com médicos.</a:t>
             </a:r>
             <a:endParaRPr lang="en-US" sz="1300" dirty="0"/>
           </a:p>
@@ -2169,7 +2169,7 @@
                 <a:ea typeface="Aptos Display" pitchFamily="34" charset="-122"/>
                 <a:cs typeface="Aptos Display" pitchFamily="34" charset="-120"/>
               </a:rPr>
-              <a:t>[INSERIR UMA FRASE REAL, CURTA E FORTE]</a:t>
+              <a:t>“O prontuário deveria registrar a consulta, não interrompê-la.”</a:t>
             </a:r>
             <a:endParaRPr lang="en-US" sz="2200" dirty="0"/>
           </a:p>
@@ -2208,7 +2208,7 @@
                 <a:ea typeface="Aptos" pitchFamily="34" charset="-122"/>
                 <a:cs typeface="Aptos" pitchFamily="34" charset="-120"/>
               </a:rPr>
-              <a:t>— Médico entrevistado · especialidade</a:t>
+              <a:t>— Dr. Ranieri · médico entrevistado</a:t>
             </a:r>
             <a:endParaRPr lang="en-US" sz="1000" dirty="0"/>
           </a:p>
@@ -2544,7 +2544,7 @@
         <p:spPr>
           <a:xfrm>
             <a:off x="7882128" y="3730752"/>
-            <a:ext cx="1298448" cy="384048"/>
+            <a:ext cx="1645920" cy="384048"/>
           </a:xfrm>
           <a:prstGeom prst="roundRect">
             <a:avLst>
@@ -2571,7 +2571,7 @@
         <p:spPr>
           <a:xfrm>
             <a:off x="7991856" y="3794760"/>
-            <a:ext cx="1078992" cy="201168"/>
+            <a:ext cx="1426464" cy="201168"/>
           </a:xfrm>
           <a:prstGeom prst="rect">
             <a:avLst/>
@@ -2597,7 +2597,7 @@
                 <a:ea typeface="Aptos" pitchFamily="34" charset="-122"/>
                 <a:cs typeface="Aptos" pitchFamily="34" charset="-120"/>
               </a:rPr>
-              <a:t>MAIOR RECEIO</a:t>
+              <a:t>EIXOS DE VALIDAÇÃO</a:t>
             </a:r>
             <a:endParaRPr lang="en-US" sz="1050" dirty="0"/>
           </a:p>
@@ -2636,7 +2636,7 @@
                 <a:ea typeface="Aptos Display" pitchFamily="34" charset="-122"/>
                 <a:cs typeface="Aptos Display" pitchFamily="34" charset="-120"/>
               </a:rPr>
-              <a:t>[precisão · privacidade · revisão · bateria]</a:t>
+              <a:t>Precisão · privacidade · revisão · bateria</a:t>
             </a:r>
             <a:endParaRPr lang="en-US" sz="1900" dirty="0"/>
           </a:p>

--- a/docs/entrega/pitch/PITCH_AI_GLASSES_BRASIL.pptx
+++ b/docs/entrega/pitch/PITCH_AI_GLASSES_BRASIL.pptx
@@ -690,7 +690,7 @@
               <a:t>Nossa proposta é um assistente de prontuário automático para Ray-Ban Meta.
 O médico conduz a consulta sem tocar em telas.
 O áudio é processado localmente no Android, fotos e atestados podem ser solicitados por voz e, ao final, o médico recebe um rascunho para revisar.
-A IA prepara; o médico decide.</a:t>
+A inteligência artificial prepara; o médico decide.</a:t>
             </a:r>
             <a:endParaRPr lang="en-US" dirty="0"/>
           </a:p>
@@ -963,6 +963,7 @@
               <a:rPr lang="en-US" dirty="0"/>
               <a:t>Já validamos o pipeline completo no emulador Android: áudio real, transcrição, foto por voz, SOAP, atestado, criptografia e revisão.
 São 52 testes automatizados.
+Nossa equipe reúne Lucas Pacheco em Android e front-end, Marcos Paulo em inteligência artificial e Lucas Isaac em inteligência artificial, privacidade e requisitos.
 No hackathon, nossa primeira hora será dedicada a validar o HFP, a câmera DAT e a autonomia no hardware real.
 Não queremos substituir o julgamento médico. Queremos devolver ao médico tempo e atenção para o paciente.</a:t>
             </a:r>
@@ -3169,7 +3170,7 @@
                 <a:ea typeface="Aptos" pitchFamily="34" charset="-122"/>
                 <a:cs typeface="Aptos" pitchFamily="34" charset="-120"/>
               </a:rPr>
-              <a:t>Prontuário SOAP processado localmente</a:t>
+              <a:t>Prontuário clínico processado localmente</a:t>
             </a:r>
             <a:endParaRPr lang="en-US" sz="1700" dirty="0"/>
           </a:p>
@@ -4172,7 +4173,7 @@
                 <a:ea typeface="Aptos" pitchFamily="34" charset="-122"/>
                 <a:cs typeface="Aptos" pitchFamily="34" charset="-120"/>
               </a:rPr>
-              <a:t>Áudio via HFP</a:t>
+              <a:t>Áudio pelos óculos</a:t>
             </a:r>
             <a:endParaRPr lang="en-US" sz="1150" dirty="0"/>
           </a:p>
@@ -4560,7 +4561,7 @@
                 <a:ea typeface="Aptos" pitchFamily="34" charset="-122"/>
                 <a:cs typeface="Aptos" pitchFamily="34" charset="-120"/>
               </a:rPr>
-              <a:t>SOAP local com proveniência</a:t>
+              <a:t>Prontuário com origem</a:t>
             </a:r>
             <a:endParaRPr lang="en-US" sz="1150" dirty="0"/>
           </a:p>
@@ -4793,7 +4794,7 @@
                 <a:ea typeface="Aptos" pitchFamily="34" charset="-122"/>
                 <a:cs typeface="Aptos" pitchFamily="34" charset="-120"/>
               </a:rPr>
-              <a:t>ASR não reconheceu um CID? O sistema omite o dado — não tenta adivinhar.</a:t>
+              <a:t>A transcrição falhou em um código clínico? O sistema omite — não tenta adivinhar.</a:t>
             </a:r>
             <a:endParaRPr lang="en-US" sz="1400" dirty="0"/>
           </a:p>
@@ -5033,7 +5034,7 @@
                 <a:ea typeface="Aptos Display" pitchFamily="34" charset="-122"/>
                 <a:cs typeface="Aptos Display" pitchFamily="34" charset="-120"/>
               </a:rPr>
-              <a:t>IA local. Médico no controle.</a:t>
+              <a:t>Inteligência local. Médico no controle.</a:t>
             </a:r>
             <a:endParaRPr lang="en-US" sz="3000" dirty="0"/>
           </a:p>
@@ -5175,7 +5176,7 @@
                 <a:ea typeface="Aptos" pitchFamily="34" charset="-122"/>
                 <a:cs typeface="Aptos" pitchFamily="34" charset="-120"/>
               </a:rPr>
-              <a:t>HFP + câmera DAT 0.9</a:t>
+              <a:t>Áudio + câmera Meta</a:t>
             </a:r>
             <a:endParaRPr lang="en-US" sz="1050" dirty="0"/>
           </a:p>
@@ -5392,7 +5393,7 @@
                 <a:ea typeface="Aptos Display" pitchFamily="34" charset="-122"/>
                 <a:cs typeface="Aptos Display" pitchFamily="34" charset="-120"/>
               </a:rPr>
-              <a:t>IA CLÍNICA</a:t>
+              <a:t>PIPELINE CLÍNICO</a:t>
             </a:r>
             <a:endParaRPr lang="en-US" sz="1700" dirty="0"/>
           </a:p>
@@ -5431,7 +5432,7 @@
                 <a:ea typeface="Aptos" pitchFamily="34" charset="-122"/>
                 <a:cs typeface="Aptos" pitchFamily="34" charset="-120"/>
               </a:rPr>
-              <a:t>Fatos + SOAP + origem</a:t>
+              <a:t>Fatos + prontuário + origem</a:t>
             </a:r>
             <a:endParaRPr lang="en-US" sz="1050" dirty="0"/>
           </a:p>
@@ -5648,7 +5649,7 @@
                 <a:ea typeface="Aptos Display" pitchFamily="34" charset="-122"/>
                 <a:cs typeface="Aptos Display" pitchFamily="34" charset="-120"/>
               </a:rPr>
-              <a:t>TTS</a:t>
+              <a:t>VOZ</a:t>
             </a:r>
             <a:endParaRPr lang="en-US" sz="1600" dirty="0"/>
           </a:p>
@@ -5819,7 +5820,7 @@
                 <a:ea typeface="Aptos" pitchFamily="34" charset="-122"/>
                 <a:cs typeface="Aptos" pitchFamily="34" charset="-120"/>
               </a:rPr>
-              <a:t>HFP indisponível → mic do telefone</a:t>
+              <a:t>Áudio dos óculos indisponível → mic do telefone</a:t>
             </a:r>
             <a:endParaRPr lang="en-US" sz="1700" dirty="0"/>
           </a:p>
@@ -5885,7 +5886,7 @@
                 <a:ea typeface="Aptos" pitchFamily="34" charset="-122"/>
                 <a:cs typeface="Aptos" pitchFamily="34" charset="-120"/>
               </a:rPr>
-              <a:t>ASR incerto → não informado, nunca inferido</a:t>
+              <a:t>Transcrição incerta → não informado, nunca inferido</a:t>
             </a:r>
             <a:endParaRPr lang="en-US" sz="1700" dirty="0"/>
           </a:p>
@@ -5949,7 +5950,7 @@
                 <a:ea typeface="Aptos" pitchFamily="34" charset="-122"/>
                 <a:cs typeface="Aptos" pitchFamily="34" charset="-120"/>
               </a:rPr>
-              <a:t>Sem IA em nuvem · retenção mínima · revisão humana</a:t>
+              <a:t>Sem inteligência em nuvem · retenção mínima · revisão humana</a:t>
             </a:r>
             <a:endParaRPr lang="en-US" sz="1200" dirty="0"/>
           </a:p>
@@ -6148,7 +6149,7 @@
                 <a:ea typeface="Aptos" pitchFamily="34" charset="-122"/>
                 <a:cs typeface="Aptos" pitchFamily="34" charset="-120"/>
               </a:rPr>
-              <a:t>EVIDÊNCIA E PRÓXIMOS PASSOS</a:t>
+              <a:t>EVIDÊNCIA, EQUIPE E PRÓXIMOS PASSOS</a:t>
             </a:r>
             <a:endParaRPr lang="en-US" sz="1000" dirty="0"/>
           </a:p>
@@ -6228,7 +6229,7 @@
                 <a:ea typeface="Aptos" pitchFamily="34" charset="-122"/>
                 <a:cs typeface="Aptos" pitchFamily="34" charset="-120"/>
               </a:rPr>
-              <a:t>O risco restante está concentrado e tem protocolo de validação.</a:t>
+              <a:t>Execução comprovada, competências complementares e um próximo teste objetivo.</a:t>
             </a:r>
             <a:endParaRPr lang="en-US" sz="1300" dirty="0"/>
           </a:p>
@@ -6243,7 +6244,7 @@
         <p:spPr>
           <a:xfrm>
             <a:off x="658368" y="1847088"/>
-            <a:ext cx="3200400" cy="3520440"/>
+            <a:ext cx="3200400" cy="2880360"/>
           </a:xfrm>
           <a:prstGeom prst="roundRect">
             <a:avLst/>
@@ -6267,8 +6268,8 @@
         </p:nvSpPr>
         <p:spPr>
           <a:xfrm>
-            <a:off x="1097280" y="2212848"/>
-            <a:ext cx="2331720" cy="960120"/>
+            <a:off x="1097280" y="2057400"/>
+            <a:ext cx="2331720" cy="868680"/>
           </a:xfrm>
           <a:prstGeom prst="rect">
             <a:avLst/>
@@ -6306,7 +6307,7 @@
         </p:nvSpPr>
         <p:spPr>
           <a:xfrm>
-            <a:off x="1051560" y="3200400"/>
+            <a:off x="1051560" y="2971800"/>
             <a:ext cx="2423160" cy="347472"/>
           </a:xfrm>
           <a:prstGeom prst="rect">
@@ -6345,8 +6346,8 @@
         </p:nvSpPr>
         <p:spPr>
           <a:xfrm>
-            <a:off x="960120" y="3886200"/>
-            <a:ext cx="2606040" cy="777240"/>
+            <a:off x="960120" y="3584448"/>
+            <a:ext cx="2606040" cy="658368"/>
           </a:xfrm>
           <a:prstGeom prst="rect">
             <a:avLst/>
@@ -6387,7 +6388,7 @@
                 <a:ea typeface="Aptos" pitchFamily="34" charset="-122"/>
                 <a:cs typeface="Aptos" pitchFamily="34" charset="-120"/>
               </a:rPr>
-              <a:t>SOAP · foto · atestado · cofre · revisão</a:t>
+              <a:t>prontuário · foto · atestado · cofre · revisão</a:t>
             </a:r>
             <a:endParaRPr lang="en-US" sz="1300" dirty="0"/>
           </a:p>
@@ -6492,7 +6493,7 @@
                 <a:ea typeface="Aptos" pitchFamily="34" charset="-122"/>
                 <a:cs typeface="Aptos" pitchFamily="34" charset="-120"/>
               </a:rPr>
-              <a:t>Captura HFP da voz do paciente</a:t>
+              <a:t>Captura da voz pelos óculos</a:t>
             </a:r>
             <a:endParaRPr lang="en-US" sz="1700" dirty="0"/>
           </a:p>
@@ -6558,7 +6559,7 @@
                 <a:ea typeface="Aptos" pitchFamily="34" charset="-122"/>
                 <a:cs typeface="Aptos" pitchFamily="34" charset="-120"/>
               </a:rPr>
-              <a:t>Burst de foto com DAT 0.9</a:t>
+              <a:t>Foto pontual com o toolkit Meta</a:t>
             </a:r>
             <a:endParaRPr lang="en-US" sz="1700" dirty="0"/>
           </a:p>
@@ -6869,24 +6870,61 @@
       </p:sp>
       <p:sp>
         <p:nvSpPr>
-          <p:cNvPr id="23" name="Shape 21"/>
-          <p:cNvSpPr/>
-          <p:nvPr/>
-        </p:nvSpPr>
-        <p:spPr>
-          <a:xfrm>
-            <a:off x="4407408" y="4892040"/>
-            <a:ext cx="6720840" cy="685800"/>
-          </a:xfrm>
-          <a:prstGeom prst="roundRect">
-            <a:avLst/>
-          </a:prstGeom>
-          <a:solidFill>
-            <a:srgbClr val="192321"/>
-          </a:solidFill>
-          <a:ln w="12700">
+          <p:cNvPr id="23" name="Text 21"/>
+          <p:cNvSpPr/>
+          <p:nvPr/>
+        </p:nvSpPr>
+        <p:spPr>
+          <a:xfrm>
+            <a:off x="685800" y="4965192"/>
+            <a:ext cx="914400" cy="228600"/>
+          </a:xfrm>
+          <a:prstGeom prst="rect">
+            <a:avLst/>
+          </a:prstGeom>
+          <a:noFill/>
+          <a:ln/>
+        </p:spPr>
+        <p:txBody>
+          <a:bodyPr wrap="square" lIns="0" tIns="0" rIns="0" bIns="0" rtlCol="0" anchor="ctr"/>
+          <a:lstStyle/>
+          <a:p>
+            <a:pPr indent="0" marL="0">
+              <a:buNone/>
+            </a:pPr>
+            <a:r>
+              <a:rPr lang="en-US" sz="1050" b="1" spc="110" kern="0" dirty="0">
+                <a:solidFill>
+                  <a:srgbClr val="0E604B"/>
+                </a:solidFill>
+                <a:latin typeface="Aptos" pitchFamily="34" charset="0"/>
+                <a:ea typeface="Aptos" pitchFamily="34" charset="-122"/>
+                <a:cs typeface="Aptos" pitchFamily="34" charset="-120"/>
+              </a:rPr>
+              <a:t>EQUIPE</a:t>
+            </a:r>
+            <a:endParaRPr lang="en-US" sz="1050" dirty="0"/>
+          </a:p>
+        </p:txBody>
+      </p:sp>
+      <p:sp>
+        <p:nvSpPr>
+          <p:cNvPr id="24" name="Shape 22"/>
+          <p:cNvSpPr/>
+          <p:nvPr/>
+        </p:nvSpPr>
+        <p:spPr>
+          <a:xfrm>
+            <a:off x="685800" y="5321808"/>
+            <a:ext cx="3337560" cy="0"/>
+          </a:xfrm>
+          <a:prstGeom prst="line">
+            <a:avLst/>
+          </a:prstGeom>
+          <a:noFill/>
+          <a:ln w="25400">
             <a:solidFill>
-              <a:srgbClr val="192321"/>
+              <a:srgbClr val="0E604B"/>
             </a:solidFill>
             <a:prstDash val="solid"/>
           </a:ln>
@@ -6894,69 +6932,73 @@
       </p:sp>
       <p:sp>
         <p:nvSpPr>
-          <p:cNvPr id="24" name="Text 22"/>
-          <p:cNvSpPr/>
-          <p:nvPr/>
-        </p:nvSpPr>
-        <p:spPr>
-          <a:xfrm>
-            <a:off x="4709160" y="5102352"/>
-            <a:ext cx="6126480" cy="246888"/>
-          </a:xfrm>
-          <a:prstGeom prst="rect">
-            <a:avLst/>
-          </a:prstGeom>
-          <a:noFill/>
-          <a:ln/>
-        </p:spPr>
-        <p:txBody>
-          <a:bodyPr wrap="square" lIns="0" tIns="0" rIns="0" bIns="0" rtlCol="0" anchor="ctr"/>
-          <a:lstStyle/>
-          <a:p>
-            <a:pPr algn="ctr" indent="0" marL="0">
-              <a:buNone/>
-            </a:pPr>
-            <a:r>
-              <a:rPr lang="en-US" sz="1800" b="1" dirty="0">
-                <a:solidFill>
-                  <a:srgbClr val="FFFFFF"/>
+          <p:cNvPr id="25" name="Text 23"/>
+          <p:cNvSpPr/>
+          <p:nvPr/>
+        </p:nvSpPr>
+        <p:spPr>
+          <a:xfrm>
+            <a:off x="685800" y="5468112"/>
+            <a:ext cx="3337560" cy="219456"/>
+          </a:xfrm>
+          <a:prstGeom prst="rect">
+            <a:avLst/>
+          </a:prstGeom>
+          <a:noFill/>
+          <a:ln/>
+        </p:spPr>
+        <p:txBody>
+          <a:bodyPr wrap="square" lIns="0" tIns="0" rIns="0" bIns="0" rtlCol="0" anchor="ctr">
+            <a:normAutofit/>
+          </a:bodyPr>
+          <a:lstStyle/>
+          <a:p>
+            <a:pPr indent="0" marL="0">
+              <a:buNone/>
+            </a:pPr>
+            <a:r>
+              <a:rPr lang="en-US" sz="1300" b="1" dirty="0">
+                <a:solidFill>
+                  <a:srgbClr val="192321"/>
                 </a:solidFill>
                 <a:latin typeface="Aptos Display" pitchFamily="34" charset="0"/>
                 <a:ea typeface="Aptos Display" pitchFamily="34" charset="-122"/>
                 <a:cs typeface="Aptos Display" pitchFamily="34" charset="-120"/>
               </a:rPr>
-              <a:t>Devolver ao médico tempo e atenção para o paciente.</a:t>
-            </a:r>
-            <a:endParaRPr lang="en-US" sz="1800" dirty="0"/>
-          </a:p>
-        </p:txBody>
-      </p:sp>
-      <p:sp>
-        <p:nvSpPr>
-          <p:cNvPr id="25" name="Text 23"/>
-          <p:cNvSpPr/>
-          <p:nvPr/>
-        </p:nvSpPr>
-        <p:spPr>
-          <a:xfrm>
-            <a:off x="594360" y="6428232"/>
-            <a:ext cx="5394960" cy="164592"/>
-          </a:xfrm>
-          <a:prstGeom prst="rect">
-            <a:avLst/>
-          </a:prstGeom>
-          <a:noFill/>
-          <a:ln/>
-        </p:spPr>
-        <p:txBody>
-          <a:bodyPr wrap="square" lIns="0" tIns="0" rIns="0" bIns="0" rtlCol="0" anchor="ctr"/>
+              <a:t>LUCAS PACHECO</a:t>
+            </a:r>
+            <a:endParaRPr lang="en-US" sz="1300" dirty="0"/>
+          </a:p>
+        </p:txBody>
+      </p:sp>
+      <p:sp>
+        <p:nvSpPr>
+          <p:cNvPr id="26" name="Text 24"/>
+          <p:cNvSpPr/>
+          <p:nvPr/>
+        </p:nvSpPr>
+        <p:spPr>
+          <a:xfrm>
+            <a:off x="685800" y="5742432"/>
+            <a:ext cx="3337560" cy="274320"/>
+          </a:xfrm>
+          <a:prstGeom prst="rect">
+            <a:avLst/>
+          </a:prstGeom>
+          <a:noFill/>
+          <a:ln/>
+        </p:spPr>
+        <p:txBody>
+          <a:bodyPr wrap="square" lIns="0" tIns="0" rIns="0" bIns="0" rtlCol="0" anchor="ctr">
+            <a:normAutofit/>
+          </a:bodyPr>
           <a:lstStyle/>
           <a:p>
             <a:pPr indent="0" marL="0">
               <a:buNone/>
             </a:pPr>
             <a:r>
-              <a:rPr lang="en-US" sz="750" dirty="0">
+              <a:rPr lang="en-US" sz="1050" dirty="0">
                 <a:solidFill>
                   <a:srgbClr val="60706B"/>
                 </a:solidFill>
@@ -6964,6 +7006,294 @@
                 <a:ea typeface="Aptos" pitchFamily="34" charset="-122"/>
                 <a:cs typeface="Aptos" pitchFamily="34" charset="-120"/>
               </a:rPr>
+              <a:t>Android e front-end</a:t>
+            </a:r>
+            <a:endParaRPr lang="en-US" sz="1050" dirty="0"/>
+          </a:p>
+        </p:txBody>
+      </p:sp>
+      <p:sp>
+        <p:nvSpPr>
+          <p:cNvPr id="27" name="Shape 25"/>
+          <p:cNvSpPr/>
+          <p:nvPr/>
+        </p:nvSpPr>
+        <p:spPr>
+          <a:xfrm>
+            <a:off x="4462272" y="5321808"/>
+            <a:ext cx="3337560" cy="0"/>
+          </a:xfrm>
+          <a:prstGeom prst="line">
+            <a:avLst/>
+          </a:prstGeom>
+          <a:noFill/>
+          <a:ln w="25400">
+            <a:solidFill>
+              <a:srgbClr val="0E604B"/>
+            </a:solidFill>
+            <a:prstDash val="solid"/>
+          </a:ln>
+        </p:spPr>
+      </p:sp>
+      <p:sp>
+        <p:nvSpPr>
+          <p:cNvPr id="28" name="Text 26"/>
+          <p:cNvSpPr/>
+          <p:nvPr/>
+        </p:nvSpPr>
+        <p:spPr>
+          <a:xfrm>
+            <a:off x="4462272" y="5468112"/>
+            <a:ext cx="3337560" cy="219456"/>
+          </a:xfrm>
+          <a:prstGeom prst="rect">
+            <a:avLst/>
+          </a:prstGeom>
+          <a:noFill/>
+          <a:ln/>
+        </p:spPr>
+        <p:txBody>
+          <a:bodyPr wrap="square" lIns="0" tIns="0" rIns="0" bIns="0" rtlCol="0" anchor="ctr">
+            <a:normAutofit/>
+          </a:bodyPr>
+          <a:lstStyle/>
+          <a:p>
+            <a:pPr indent="0" marL="0">
+              <a:buNone/>
+            </a:pPr>
+            <a:r>
+              <a:rPr lang="en-US" sz="1300" b="1" dirty="0">
+                <a:solidFill>
+                  <a:srgbClr val="192321"/>
+                </a:solidFill>
+                <a:latin typeface="Aptos Display" pitchFamily="34" charset="0"/>
+                <a:ea typeface="Aptos Display" pitchFamily="34" charset="-122"/>
+                <a:cs typeface="Aptos Display" pitchFamily="34" charset="-120"/>
+              </a:rPr>
+              <a:t>MARCOS PAULO</a:t>
+            </a:r>
+            <a:endParaRPr lang="en-US" sz="1300" dirty="0"/>
+          </a:p>
+        </p:txBody>
+      </p:sp>
+      <p:sp>
+        <p:nvSpPr>
+          <p:cNvPr id="29" name="Text 27"/>
+          <p:cNvSpPr/>
+          <p:nvPr/>
+        </p:nvSpPr>
+        <p:spPr>
+          <a:xfrm>
+            <a:off x="4462272" y="5742432"/>
+            <a:ext cx="3337560" cy="274320"/>
+          </a:xfrm>
+          <a:prstGeom prst="rect">
+            <a:avLst/>
+          </a:prstGeom>
+          <a:noFill/>
+          <a:ln/>
+        </p:spPr>
+        <p:txBody>
+          <a:bodyPr wrap="square" lIns="0" tIns="0" rIns="0" bIns="0" rtlCol="0" anchor="ctr">
+            <a:normAutofit/>
+          </a:bodyPr>
+          <a:lstStyle/>
+          <a:p>
+            <a:pPr indent="0" marL="0">
+              <a:buNone/>
+            </a:pPr>
+            <a:r>
+              <a:rPr lang="en-US" sz="1050" dirty="0">
+                <a:solidFill>
+                  <a:srgbClr val="60706B"/>
+                </a:solidFill>
+                <a:latin typeface="Aptos" pitchFamily="34" charset="0"/>
+                <a:ea typeface="Aptos" pitchFamily="34" charset="-122"/>
+                <a:cs typeface="Aptos" pitchFamily="34" charset="-120"/>
+              </a:rPr>
+              <a:t>Inteligência artificial</a:t>
+            </a:r>
+            <a:endParaRPr lang="en-US" sz="1050" dirty="0"/>
+          </a:p>
+        </p:txBody>
+      </p:sp>
+      <p:sp>
+        <p:nvSpPr>
+          <p:cNvPr id="30" name="Shape 28"/>
+          <p:cNvSpPr/>
+          <p:nvPr/>
+        </p:nvSpPr>
+        <p:spPr>
+          <a:xfrm>
+            <a:off x="8238744" y="5321808"/>
+            <a:ext cx="3337560" cy="0"/>
+          </a:xfrm>
+          <a:prstGeom prst="line">
+            <a:avLst/>
+          </a:prstGeom>
+          <a:noFill/>
+          <a:ln w="25400">
+            <a:solidFill>
+              <a:srgbClr val="F06B4F"/>
+            </a:solidFill>
+            <a:prstDash val="solid"/>
+          </a:ln>
+        </p:spPr>
+      </p:sp>
+      <p:sp>
+        <p:nvSpPr>
+          <p:cNvPr id="31" name="Text 29"/>
+          <p:cNvSpPr/>
+          <p:nvPr/>
+        </p:nvSpPr>
+        <p:spPr>
+          <a:xfrm>
+            <a:off x="8238744" y="5468112"/>
+            <a:ext cx="3337560" cy="219456"/>
+          </a:xfrm>
+          <a:prstGeom prst="rect">
+            <a:avLst/>
+          </a:prstGeom>
+          <a:noFill/>
+          <a:ln/>
+        </p:spPr>
+        <p:txBody>
+          <a:bodyPr wrap="square" lIns="0" tIns="0" rIns="0" bIns="0" rtlCol="0" anchor="ctr">
+            <a:normAutofit/>
+          </a:bodyPr>
+          <a:lstStyle/>
+          <a:p>
+            <a:pPr indent="0" marL="0">
+              <a:buNone/>
+            </a:pPr>
+            <a:r>
+              <a:rPr lang="en-US" sz="1300" b="1" dirty="0">
+                <a:solidFill>
+                  <a:srgbClr val="192321"/>
+                </a:solidFill>
+                <a:latin typeface="Aptos Display" pitchFamily="34" charset="0"/>
+                <a:ea typeface="Aptos Display" pitchFamily="34" charset="-122"/>
+                <a:cs typeface="Aptos Display" pitchFamily="34" charset="-120"/>
+              </a:rPr>
+              <a:t>LUCAS ISAAC</a:t>
+            </a:r>
+            <a:endParaRPr lang="en-US" sz="1300" dirty="0"/>
+          </a:p>
+        </p:txBody>
+      </p:sp>
+      <p:sp>
+        <p:nvSpPr>
+          <p:cNvPr id="32" name="Text 30"/>
+          <p:cNvSpPr/>
+          <p:nvPr/>
+        </p:nvSpPr>
+        <p:spPr>
+          <a:xfrm>
+            <a:off x="8238744" y="5742432"/>
+            <a:ext cx="3337560" cy="274320"/>
+          </a:xfrm>
+          <a:prstGeom prst="rect">
+            <a:avLst/>
+          </a:prstGeom>
+          <a:noFill/>
+          <a:ln/>
+        </p:spPr>
+        <p:txBody>
+          <a:bodyPr wrap="square" lIns="0" tIns="0" rIns="0" bIns="0" rtlCol="0" anchor="ctr">
+            <a:normAutofit/>
+          </a:bodyPr>
+          <a:lstStyle/>
+          <a:p>
+            <a:pPr indent="0" marL="0">
+              <a:buNone/>
+            </a:pPr>
+            <a:r>
+              <a:rPr lang="en-US" sz="1050" dirty="0">
+                <a:solidFill>
+                  <a:srgbClr val="60706B"/>
+                </a:solidFill>
+                <a:latin typeface="Aptos" pitchFamily="34" charset="0"/>
+                <a:ea typeface="Aptos" pitchFamily="34" charset="-122"/>
+                <a:cs typeface="Aptos" pitchFamily="34" charset="-120"/>
+              </a:rPr>
+              <a:t>Inteligência artificial, privacidade e requisitos</a:t>
+            </a:r>
+            <a:endParaRPr lang="en-US" sz="1050" dirty="0"/>
+          </a:p>
+        </p:txBody>
+      </p:sp>
+      <p:sp>
+        <p:nvSpPr>
+          <p:cNvPr id="33" name="Text 31"/>
+          <p:cNvSpPr/>
+          <p:nvPr/>
+        </p:nvSpPr>
+        <p:spPr>
+          <a:xfrm>
+            <a:off x="2971800" y="6099048"/>
+            <a:ext cx="6263640" cy="228600"/>
+          </a:xfrm>
+          <a:prstGeom prst="rect">
+            <a:avLst/>
+          </a:prstGeom>
+          <a:noFill/>
+          <a:ln/>
+        </p:spPr>
+        <p:txBody>
+          <a:bodyPr wrap="square" lIns="0" tIns="0" rIns="0" bIns="0" rtlCol="0" anchor="ctr"/>
+          <a:lstStyle/>
+          <a:p>
+            <a:pPr algn="ctr" indent="0" marL="0">
+              <a:buNone/>
+            </a:pPr>
+            <a:r>
+              <a:rPr lang="en-US" sz="1500" b="1" dirty="0">
+                <a:solidFill>
+                  <a:srgbClr val="0E604B"/>
+                </a:solidFill>
+                <a:latin typeface="Aptos Display" pitchFamily="34" charset="0"/>
+                <a:ea typeface="Aptos Display" pitchFamily="34" charset="-122"/>
+                <a:cs typeface="Aptos Display" pitchFamily="34" charset="-120"/>
+              </a:rPr>
+              <a:t>Devolver ao médico tempo e atenção para o paciente.</a:t>
+            </a:r>
+            <a:endParaRPr lang="en-US" sz="1500" dirty="0"/>
+          </a:p>
+        </p:txBody>
+      </p:sp>
+      <p:sp>
+        <p:nvSpPr>
+          <p:cNvPr id="34" name="Text 32"/>
+          <p:cNvSpPr/>
+          <p:nvPr/>
+        </p:nvSpPr>
+        <p:spPr>
+          <a:xfrm>
+            <a:off x="594360" y="6428232"/>
+            <a:ext cx="5394960" cy="164592"/>
+          </a:xfrm>
+          <a:prstGeom prst="rect">
+            <a:avLst/>
+          </a:prstGeom>
+          <a:noFill/>
+          <a:ln/>
+        </p:spPr>
+        <p:txBody>
+          <a:bodyPr wrap="square" lIns="0" tIns="0" rIns="0" bIns="0" rtlCol="0" anchor="ctr"/>
+          <a:lstStyle/>
+          <a:p>
+            <a:pPr indent="0" marL="0">
+              <a:buNone/>
+            </a:pPr>
+            <a:r>
+              <a:rPr lang="en-US" sz="750" dirty="0">
+                <a:solidFill>
+                  <a:srgbClr val="60706B"/>
+                </a:solidFill>
+                <a:latin typeface="Aptos" pitchFamily="34" charset="0"/>
+                <a:ea typeface="Aptos" pitchFamily="34" charset="-122"/>
+                <a:cs typeface="Aptos" pitchFamily="34" charset="-120"/>
+              </a:rPr>
               <a:t>Assistente de Prontuário Automático · AI Glasses Brasil 2026</a:t>
             </a:r>
             <a:endParaRPr lang="en-US" sz="750" dirty="0"/>
@@ -6972,7 +7302,7 @@
       </p:sp>
       <p:sp>
         <p:nvSpPr>
-          <p:cNvPr id="26" name="Text 24">
+          <p:cNvPr id="35" name="Text 33">
             <a:hlinkClick r:id="rId1" tooltip=""/>
           </p:cNvPr>
           <p:cNvSpPr/>

--- a/docs/entrega/pitch/PITCH_AI_GLASSES_BRASIL.pptx
+++ b/docs/entrega/pitch/PITCH_AI_GLASSES_BRASIL.pptx
@@ -507,7 +507,8 @@
           <a:p>
             <a:r>
               <a:rPr lang="en-US" dirty="0"/>
-              <a:t>Uma consulta deveria ser uma conversa entre médico e paciente.
+              <a:t>Nós somos a Medware.
+Nossa proposta é simples: a consulta fica com o médico; o registro, com a inteligência.
 Mas o médico precisa escutar, raciocinar e documentar ao mesmo tempo.
 Essa disputa reduz o contato visual e frequentemente estende o trabalho para depois do atendimento.</a:t>
             </a:r>
@@ -687,7 +688,7 @@
           <a:p>
             <a:r>
               <a:rPr lang="en-US" dirty="0"/>
-              <a:t>Nossa proposta é um assistente de prontuário automático para Ray-Ban Meta.
+              <a:t>A Medware é um assistente de prontuário automático para Ray-Ban Meta.
 O médico conduz a consulta sem tocar em telas.
 O áudio é processado localmente no Android, fotos e atestados podem ser solicitados por voz e, ao final, o médico recebe um rascunho para revisar.
 A inteligência artificial prepara; o médico decide.</a:t>
@@ -1555,8 +1556,47 @@
         </p:nvSpPr>
         <p:spPr>
           <a:xfrm>
-            <a:off x="658368" y="658368"/>
-            <a:ext cx="5120640" cy="1325880"/>
+            <a:off x="685800" y="438912"/>
+            <a:ext cx="4480560" cy="219456"/>
+          </a:xfrm>
+          <a:prstGeom prst="rect">
+            <a:avLst/>
+          </a:prstGeom>
+          <a:noFill/>
+          <a:ln/>
+        </p:spPr>
+        <p:txBody>
+          <a:bodyPr wrap="square" lIns="0" tIns="0" rIns="0" bIns="0" rtlCol="0" anchor="ctr"/>
+          <a:lstStyle/>
+          <a:p>
+            <a:pPr indent="0" marL="0">
+              <a:buNone/>
+            </a:pPr>
+            <a:r>
+              <a:rPr lang="en-US" sz="950" b="1" spc="150" kern="0" dirty="0">
+                <a:solidFill>
+                  <a:srgbClr val="A9B8B2"/>
+                </a:solidFill>
+                <a:latin typeface="Aptos" pitchFamily="34" charset="0"/>
+                <a:ea typeface="Aptos" pitchFamily="34" charset="-122"/>
+                <a:cs typeface="Aptos" pitchFamily="34" charset="-120"/>
+              </a:rPr>
+              <a:t>AI GLASSES BRASIL 2026  ·  BEM-ESTAR</a:t>
+            </a:r>
+            <a:endParaRPr lang="en-US" sz="950" dirty="0"/>
+          </a:p>
+        </p:txBody>
+      </p:sp>
+      <p:sp>
+        <p:nvSpPr>
+          <p:cNvPr id="5" name="Text 2"/>
+          <p:cNvSpPr/>
+          <p:nvPr/>
+        </p:nvSpPr>
+        <p:spPr>
+          <a:xfrm>
+            <a:off x="658368" y="804672"/>
+            <a:ext cx="4480560" cy="713232"/>
           </a:xfrm>
           <a:prstGeom prst="rect">
             <a:avLst/>
@@ -1574,7 +1614,7 @@
               <a:buNone/>
             </a:pPr>
             <a:r>
-              <a:rPr lang="en-US" sz="2900" b="1" dirty="0">
+              <a:rPr lang="en-US" sz="4300" b="1" dirty="0">
                 <a:solidFill>
                   <a:srgbClr val="FFFFFF"/>
                 </a:solidFill>
@@ -1582,55 +1622,135 @@
                 <a:ea typeface="Aptos Display" pitchFamily="34" charset="-122"/>
                 <a:cs typeface="Aptos Display" pitchFamily="34" charset="-120"/>
               </a:rPr>
-              <a:t>O PRONTUÁRIO DISPUTA</a:t>
-            </a:r>
-            <a:endParaRPr lang="en-US" sz="2900" dirty="0"/>
-          </a:p>
-          <a:p>
+              <a:t>MED</a:t>
+            </a:r>
             <a:pPr indent="0" marL="0">
               <a:buNone/>
             </a:pPr>
             <a:r>
-              <a:rPr lang="en-US" sz="2900" b="1" dirty="0">
-                <a:solidFill>
-                  <a:srgbClr val="FFFFFF"/>
+              <a:rPr lang="en-US" sz="4300" b="1" dirty="0">
+                <a:solidFill>
+                  <a:srgbClr val="C8E662"/>
                 </a:solidFill>
                 <a:latin typeface="Aptos Display" pitchFamily="34" charset="0"/>
                 <a:ea typeface="Aptos Display" pitchFamily="34" charset="-122"/>
                 <a:cs typeface="Aptos Display" pitchFamily="34" charset="-120"/>
               </a:rPr>
-              <a:t>ATENÇÃO COM O PACIENTE</a:t>
-            </a:r>
-            <a:endParaRPr lang="en-US" sz="2900" dirty="0"/>
-          </a:p>
-        </p:txBody>
-      </p:sp>
-      <p:sp>
-        <p:nvSpPr>
-          <p:cNvPr id="5" name="Text 2"/>
-          <p:cNvSpPr/>
-          <p:nvPr/>
-        </p:nvSpPr>
-        <p:spPr>
-          <a:xfrm>
-            <a:off x="685800" y="2148840"/>
-            <a:ext cx="4434840" cy="594360"/>
-          </a:xfrm>
-          <a:prstGeom prst="rect">
-            <a:avLst/>
-          </a:prstGeom>
-          <a:noFill/>
-          <a:ln/>
-        </p:spPr>
-        <p:txBody>
-          <a:bodyPr wrap="square" lIns="0" tIns="0" rIns="0" bIns="0" rtlCol="0" anchor="ctr"/>
+              <a:t>WARE</a:t>
+            </a:r>
+            <a:endParaRPr lang="en-US" sz="4300" dirty="0"/>
+          </a:p>
+        </p:txBody>
+      </p:sp>
+      <p:sp>
+        <p:nvSpPr>
+          <p:cNvPr id="6" name="Shape 3"/>
+          <p:cNvSpPr/>
+          <p:nvPr/>
+        </p:nvSpPr>
+        <p:spPr>
+          <a:xfrm>
+            <a:off x="685800" y="1627632"/>
+            <a:ext cx="786384" cy="0"/>
+          </a:xfrm>
+          <a:prstGeom prst="line">
+            <a:avLst/>
+          </a:prstGeom>
+          <a:noFill/>
+          <a:ln w="50800">
+            <a:solidFill>
+              <a:srgbClr val="F06B4F"/>
+            </a:solidFill>
+            <a:prstDash val="solid"/>
+          </a:ln>
+        </p:spPr>
+      </p:sp>
+      <p:sp>
+        <p:nvSpPr>
+          <p:cNvPr id="7" name="Text 4"/>
+          <p:cNvSpPr/>
+          <p:nvPr/>
+        </p:nvSpPr>
+        <p:spPr>
+          <a:xfrm>
+            <a:off x="685800" y="1901952"/>
+            <a:ext cx="4526280" cy="868680"/>
+          </a:xfrm>
+          <a:prstGeom prst="rect">
+            <a:avLst/>
+          </a:prstGeom>
+          <a:noFill/>
+          <a:ln/>
+        </p:spPr>
+        <p:txBody>
+          <a:bodyPr wrap="square" lIns="0" tIns="0" rIns="0" bIns="0" rtlCol="0" anchor="ctr">
+            <a:normAutofit/>
+          </a:bodyPr>
           <a:lstStyle/>
           <a:p>
             <a:pPr indent="0" marL="0">
               <a:buNone/>
             </a:pPr>
             <a:r>
-              <a:rPr lang="en-US" sz="1700" dirty="0">
+              <a:rPr lang="en-US" sz="2300" b="1" dirty="0">
+                <a:solidFill>
+                  <a:srgbClr val="FFFFFF"/>
+                </a:solidFill>
+                <a:latin typeface="Aptos Display" pitchFamily="34" charset="0"/>
+                <a:ea typeface="Aptos Display" pitchFamily="34" charset="-122"/>
+                <a:cs typeface="Aptos Display" pitchFamily="34" charset="-120"/>
+              </a:rPr>
+              <a:t>A consulta fica com o médico.</a:t>
+            </a:r>
+            <a:endParaRPr lang="en-US" sz="2300" dirty="0"/>
+          </a:p>
+          <a:p>
+            <a:pPr indent="0" marL="0">
+              <a:buNone/>
+            </a:pPr>
+            <a:r>
+              <a:rPr lang="en-US" sz="2300" b="1" dirty="0">
+                <a:solidFill>
+                  <a:srgbClr val="FFFFFF"/>
+                </a:solidFill>
+                <a:latin typeface="Aptos Display" pitchFamily="34" charset="0"/>
+                <a:ea typeface="Aptos Display" pitchFamily="34" charset="-122"/>
+                <a:cs typeface="Aptos Display" pitchFamily="34" charset="-120"/>
+              </a:rPr>
+              <a:t>O registro, com a inteligência.</a:t>
+            </a:r>
+            <a:endParaRPr lang="en-US" sz="2300" dirty="0"/>
+          </a:p>
+        </p:txBody>
+      </p:sp>
+      <p:sp>
+        <p:nvSpPr>
+          <p:cNvPr id="8" name="Text 5"/>
+          <p:cNvSpPr/>
+          <p:nvPr/>
+        </p:nvSpPr>
+        <p:spPr>
+          <a:xfrm>
+            <a:off x="685800" y="2971800"/>
+            <a:ext cx="4343400" cy="640080"/>
+          </a:xfrm>
+          <a:prstGeom prst="rect">
+            <a:avLst/>
+          </a:prstGeom>
+          <a:noFill/>
+          <a:ln/>
+        </p:spPr>
+        <p:txBody>
+          <a:bodyPr wrap="square" lIns="0" tIns="0" rIns="0" bIns="0" rtlCol="0" anchor="ctr">
+            <a:normAutofit/>
+          </a:bodyPr>
+          <a:lstStyle/>
+          <a:p>
+            <a:pPr indent="0" marL="0">
+              <a:buNone/>
+            </a:pPr>
+            <a:r>
+              <a:rPr lang="en-US" sz="1450" dirty="0">
                 <a:solidFill>
                   <a:srgbClr val="D5E1DC"/>
                 </a:solidFill>
@@ -1638,45 +1758,22 @@
                 <a:ea typeface="Aptos" pitchFamily="34" charset="-122"/>
                 <a:cs typeface="Aptos" pitchFamily="34" charset="-120"/>
               </a:rPr>
-              <a:t>Escutar, raciocinar e documentar — ao mesmo tempo.</a:t>
-            </a:r>
-            <a:endParaRPr lang="en-US" sz="1700" dirty="0"/>
-          </a:p>
-        </p:txBody>
-      </p:sp>
-      <p:sp>
-        <p:nvSpPr>
-          <p:cNvPr id="6" name="Shape 3"/>
-          <p:cNvSpPr/>
-          <p:nvPr/>
-        </p:nvSpPr>
-        <p:spPr>
-          <a:xfrm>
-            <a:off x="685800" y="2971800"/>
-            <a:ext cx="4297680" cy="0"/>
-          </a:xfrm>
-          <a:prstGeom prst="line">
-            <a:avLst/>
-          </a:prstGeom>
-          <a:noFill/>
-          <a:ln w="25400">
-            <a:solidFill>
-              <a:srgbClr val="C8E662"/>
-            </a:solidFill>
-            <a:prstDash val="solid"/>
-          </a:ln>
-        </p:spPr>
-      </p:sp>
-      <p:sp>
-        <p:nvSpPr>
-          <p:cNvPr id="7" name="Text 4"/>
-          <p:cNvSpPr/>
-          <p:nvPr/>
-        </p:nvSpPr>
-        <p:spPr>
-          <a:xfrm>
-            <a:off x="685800" y="3310128"/>
-            <a:ext cx="685800" cy="274320"/>
+              <a:t>Um assistente clínico mãos livres que transforma a consulta em rascunho de prontuário para revisão médica.</a:t>
+            </a:r>
+            <a:endParaRPr lang="en-US" sz="1450" dirty="0"/>
+          </a:p>
+        </p:txBody>
+      </p:sp>
+      <p:sp>
+        <p:nvSpPr>
+          <p:cNvPr id="9" name="Text 6"/>
+          <p:cNvSpPr/>
+          <p:nvPr/>
+        </p:nvSpPr>
+        <p:spPr>
+          <a:xfrm>
+            <a:off x="685800" y="3858768"/>
+            <a:ext cx="1645920" cy="228600"/>
           </a:xfrm>
           <a:prstGeom prst="rect">
             <a:avLst/>
@@ -1692,7 +1789,7 @@
               <a:buNone/>
             </a:pPr>
             <a:r>
-              <a:rPr lang="en-US" sz="1200" b="1" dirty="0">
+              <a:rPr lang="en-US" sz="1200" b="1" spc="120" kern="0" dirty="0">
                 <a:solidFill>
                   <a:srgbClr val="C8E662"/>
                 </a:solidFill>
@@ -1700,7 +1797,7 @@
                 <a:ea typeface="Aptos" pitchFamily="34" charset="-122"/>
                 <a:cs typeface="Aptos" pitchFamily="34" charset="-120"/>
               </a:rPr>
-              <a:t>ATÉ</a:t>
+              <a:t>O PROBLEMA</a:t>
             </a:r>
             <a:endParaRPr lang="en-US" sz="1200" dirty="0"/>
           </a:p>
@@ -1708,14 +1805,14 @@
       </p:sp>
       <p:sp>
         <p:nvSpPr>
-          <p:cNvPr id="8" name="Text 5"/>
-          <p:cNvSpPr/>
-          <p:nvPr/>
-        </p:nvSpPr>
-        <p:spPr>
-          <a:xfrm>
-            <a:off x="685800" y="3611880"/>
-            <a:ext cx="1143000" cy="841248"/>
+          <p:cNvPr id="10" name="Text 7"/>
+          <p:cNvSpPr/>
+          <p:nvPr/>
+        </p:nvSpPr>
+        <p:spPr>
+          <a:xfrm>
+            <a:off x="685800" y="4224528"/>
+            <a:ext cx="1188720" cy="777240"/>
           </a:xfrm>
           <a:prstGeom prst="rect">
             <a:avLst/>
@@ -1731,7 +1828,7 @@
               <a:buNone/>
             </a:pPr>
             <a:r>
-              <a:rPr lang="en-US" sz="4900" b="1" dirty="0">
+              <a:rPr lang="en-US" sz="4600" b="1" dirty="0">
                 <a:solidFill>
                   <a:srgbClr val="FFFFFF"/>
                 </a:solidFill>
@@ -1741,20 +1838,20 @@
               </a:rPr>
               <a:t>2h</a:t>
             </a:r>
-            <a:endParaRPr lang="en-US" sz="4900" dirty="0"/>
-          </a:p>
-        </p:txBody>
-      </p:sp>
-      <p:sp>
-        <p:nvSpPr>
-          <p:cNvPr id="9" name="Text 6"/>
-          <p:cNvSpPr/>
-          <p:nvPr/>
-        </p:nvSpPr>
-        <p:spPr>
-          <a:xfrm>
-            <a:off x="1874520" y="3703320"/>
-            <a:ext cx="3017520" cy="658368"/>
+            <a:endParaRPr lang="en-US" sz="4600" dirty="0"/>
+          </a:p>
+        </p:txBody>
+      </p:sp>
+      <p:sp>
+        <p:nvSpPr>
+          <p:cNvPr id="11" name="Text 8"/>
+          <p:cNvSpPr/>
+          <p:nvPr/>
+        </p:nvSpPr>
+        <p:spPr>
+          <a:xfrm>
+            <a:off x="1847088" y="4297680"/>
+            <a:ext cx="3154680" cy="594360"/>
           </a:xfrm>
           <a:prstGeom prst="rect">
             <a:avLst/>
@@ -1770,7 +1867,7 @@
               <a:buNone/>
             </a:pPr>
             <a:r>
-              <a:rPr lang="en-US" sz="1400" dirty="0">
+              <a:rPr lang="en-US" sz="1350" dirty="0">
                 <a:solidFill>
                   <a:srgbClr val="FFFFFF"/>
                 </a:solidFill>
@@ -1780,14 +1877,14 @@
               </a:rPr>
               <a:t>de prontuário e tarefas administrativas</a:t>
             </a:r>
-            <a:endParaRPr lang="en-US" sz="1400" dirty="0"/>
+            <a:endParaRPr lang="en-US" sz="1350" dirty="0"/>
           </a:p>
           <a:p>
             <a:pPr indent="0" marL="0">
               <a:buNone/>
             </a:pPr>
             <a:r>
-              <a:rPr lang="en-US" sz="1400" dirty="0">
+              <a:rPr lang="en-US" sz="1350" dirty="0">
                 <a:solidFill>
                   <a:srgbClr val="FFFFFF"/>
                 </a:solidFill>
@@ -1797,20 +1894,20 @@
               </a:rPr>
               <a:t>para cada 1h de atendimento clínico</a:t>
             </a:r>
-            <a:endParaRPr lang="en-US" sz="1400" dirty="0"/>
-          </a:p>
-        </p:txBody>
-      </p:sp>
-      <p:sp>
-        <p:nvSpPr>
-          <p:cNvPr id="10" name="Text 7"/>
-          <p:cNvSpPr/>
-          <p:nvPr/>
-        </p:nvSpPr>
-        <p:spPr>
-          <a:xfrm>
-            <a:off x="694944" y="4590288"/>
-            <a:ext cx="4389120" cy="256032"/>
+            <a:endParaRPr lang="en-US" sz="1350" dirty="0"/>
+          </a:p>
+        </p:txBody>
+      </p:sp>
+      <p:sp>
+        <p:nvSpPr>
+          <p:cNvPr id="12" name="Text 9"/>
+          <p:cNvSpPr/>
+          <p:nvPr/>
+        </p:nvSpPr>
+        <p:spPr>
+          <a:xfrm>
+            <a:off x="694944" y="5138928"/>
+            <a:ext cx="4389120" cy="219456"/>
           </a:xfrm>
           <a:prstGeom prst="rect">
             <a:avLst/>
@@ -1842,14 +1939,14 @@
       </p:sp>
       <p:sp>
         <p:nvSpPr>
-          <p:cNvPr id="11" name="Text 8"/>
+          <p:cNvPr id="13" name="Text 10"/>
           <p:cNvSpPr/>
           <p:nvPr/>
         </p:nvSpPr>
         <p:spPr>
           <a:xfrm>
             <a:off x="685800" y="6181344"/>
-            <a:ext cx="4206240" cy="228600"/>
+            <a:ext cx="4480560" cy="228600"/>
           </a:xfrm>
           <a:prstGeom prst="rect">
             <a:avLst/>
@@ -1865,7 +1962,7 @@
               <a:buNone/>
             </a:pPr>
             <a:r>
-              <a:rPr lang="en-US" sz="900" b="1" dirty="0">
+              <a:rPr lang="en-US" sz="850" b="1" spc="80" kern="0" dirty="0">
                 <a:solidFill>
                   <a:srgbClr val="FFFFFF"/>
                 </a:solidFill>
@@ -1873,15 +1970,15 @@
                 <a:ea typeface="Aptos" pitchFamily="34" charset="-122"/>
                 <a:cs typeface="Aptos" pitchFamily="34" charset="-120"/>
               </a:rPr>
-              <a:t>Assistente de Prontuário Automático</a:t>
-            </a:r>
-            <a:endParaRPr lang="en-US" sz="900" dirty="0"/>
-          </a:p>
-        </p:txBody>
-      </p:sp>
-      <p:sp>
-        <p:nvSpPr>
-          <p:cNvPr id="12" name="Text 9">
+              <a:t>MEDWARE  ·  ASSISTENTE DE PRONTUÁRIO AUTOMÁTICO</a:t>
+            </a:r>
+            <a:endParaRPr lang="en-US" sz="850" dirty="0"/>
+          </a:p>
+        </p:txBody>
+      </p:sp>
+      <p:sp>
+        <p:nvSpPr>
+          <p:cNvPr id="14" name="Text 11">
             <a:hlinkClick r:id="rId2" tooltip=""/>
           </p:cNvPr>
           <p:cNvSpPr/>
@@ -2676,7 +2773,7 @@
                 <a:ea typeface="Aptos" pitchFamily="34" charset="-122"/>
                 <a:cs typeface="Aptos" pitchFamily="34" charset="-120"/>
               </a:rPr>
-              <a:t>Assistente de Prontuário Automático · AI Glasses Brasil 2026</a:t>
+              <a:t>Medware · AI Glasses Brasil 2026</a:t>
             </a:r>
             <a:endParaRPr lang="en-US" sz="750" dirty="0"/>
           </a:p>
@@ -3545,7 +3642,7 @@
                 <a:ea typeface="Aptos" pitchFamily="34" charset="-122"/>
                 <a:cs typeface="Aptos" pitchFamily="34" charset="-120"/>
               </a:rPr>
-              <a:t>Assistente de Prontuário Automático · AI Glasses Brasil 2026</a:t>
+              <a:t>Medware · AI Glasses Brasil 2026</a:t>
             </a:r>
             <a:endParaRPr lang="en-US" sz="750" dirty="0"/>
           </a:p>
@@ -4833,7 +4930,7 @@
                 <a:ea typeface="Aptos" pitchFamily="34" charset="-122"/>
                 <a:cs typeface="Aptos" pitchFamily="34" charset="-120"/>
               </a:rPr>
-              <a:t>Assistente de Prontuário Automático · AI Glasses Brasil 2026</a:t>
+              <a:t>Medware · AI Glasses Brasil 2026</a:t>
             </a:r>
             <a:endParaRPr lang="en-US" sz="750" dirty="0"/>
           </a:p>
@@ -7294,7 +7391,7 @@
                 <a:ea typeface="Aptos" pitchFamily="34" charset="-122"/>
                 <a:cs typeface="Aptos" pitchFamily="34" charset="-120"/>
               </a:rPr>
-              <a:t>Assistente de Prontuário Automático · AI Glasses Brasil 2026</a:t>
+              <a:t>Medware · AI Glasses Brasil 2026</a:t>
             </a:r>
             <a:endParaRPr lang="en-US" sz="750" dirty="0"/>
           </a:p>

--- a/docs/entrega/pitch/PITCH_AI_GLASSES_BRASIL.pptx
+++ b/docs/entrega/pitch/PITCH_AI_GLASSES_BRASIL.pptx
@@ -507,10 +507,10 @@
           <a:p>
             <a:r>
               <a:rPr lang="en-US" dirty="0"/>
-              <a:t>Nós somos a Medware.
-Nossa proposta é simples: a consulta fica com o médico; o registro, com a inteligência.
-Mas o médico precisa escutar, raciocinar e documentar ao mesmo tempo.
-Essa disputa reduz o contato visual e frequentemente estende o trabalho para depois do atendimento.</a:t>
+              <a:t>[0:00–0:25]
+Nós somos a Medware. Nossa proposta é simples: a consulta fica com o médico; o registro, com a inteligência.
+Um estudo publicado por Sinsky e colaboradores observou cerca de duas horas de prontuário e tarefas administrativas para cada hora de atendimento clínico.
+Queremos enfrentar essa disputa por atenção com um assistente clínico mãos livres.</a:t>
             </a:r>
             <a:endParaRPr lang="en-US" dirty="0"/>
           </a:p>
@@ -598,9 +598,10 @@
           <a:p>
             <a:r>
               <a:rPr lang="en-US" dirty="0"/>
-              <a:t>Não queríamos assumir que um estudo internacional representava a rotina brasileira.
-O Dr. Ranieri resumiu a tensão central: o prontuário deveria registrar a consulta, não interrompê-la.
-A próxima rodada de entrevistas mede tempo, contato visual, confiança e os principais receios.</a:t>
+              <a:t>[0:25–0:45]
+Na nossa escuta inicial, o Dr. Ranieri resumiu bem o problema: “O prontuário deveria registrar a consulta, não interrompê-la.”
+Essa fala orientou nossas perguntas sobre tempo, contato visual e confiança.
+Agora, a validação deve medir quatro eixos: precisão, privacidade, revisão médica e bateria.</a:t>
             </a:r>
             <a:endParaRPr lang="en-US" dirty="0"/>
           </a:p>
@@ -688,10 +689,11 @@
           <a:p>
             <a:r>
               <a:rPr lang="en-US" dirty="0"/>
-              <a:t>A Medware é um assistente de prontuário automático para Ray-Ban Meta.
-O médico conduz a consulta sem tocar em telas.
-O áudio é processado localmente no Android, fotos e atestados podem ser solicitados por voz e, ao final, o médico recebe um rascunho para revisar.
-A inteligência artificial prepara; o médico decide.</a:t>
+              <a:t>[0:45–1:10]
+A Medware permite que o médico conduza a consulta sem alternar continuamente para uma tela.
+O áudio é processado localmente no Android, e comandos de voz permitem registrar uma foto ou preparar um atestado.
+Ao final, o médico recebe um rascunho clínico para editar, confirmar ou descartar.
+A inteligência prepara; o médico decide.</a:t>
             </a:r>
             <a:endParaRPr lang="en-US" dirty="0"/>
           </a:p>
@@ -779,11 +781,12 @@
           <a:p>
             <a:r>
               <a:rPr lang="en-US" dirty="0"/>
-              <a:t>Antes de começar, o paciente é informado e registra o consentimento.
-Durante a consulta, o microfone dos óculos envia o áudio ao Android por HFP.
-Ao dizer registrar imagem, o DAT captura uma foto pontual e responde imagem registrada.
-Ao encerrar, a IA organiza apenas fatos presentes na transcrição.
-Em nosso teste, o ASR errou um CID e o sistema corretamente o omitiu.</a:t>
+              <a:t>[1:10–1:45]
+O fluxo começa pelo consentimento. Depois, médico e paciente conversam normalmente, e somente o conteúdo autorizado entra no sistema.
+Por voz, o médico pode solicitar uma foto ou um rascunho de atestado.
+No Android, a Medware organiza fatos clínicos e preserva a origem de cada informação.
+Por fim, o médico revisa, corrige e confirma.
+Se a transcrição falhar em um código clínico, o sistema omite o dado em vez de inventar.</a:t>
             </a:r>
             <a:endParaRPr lang="en-US" dirty="0"/>
           </a:p>
@@ -871,10 +874,12 @@
           <a:p>
             <a:r>
               <a:rPr lang="en-US" dirty="0"/>
-              <a:t>O DAT 0.9 controla a câmera, enquanto o áudio usa o caminho HFP documentado pela Meta.
-No telefone, o Vosk transcreve e o pipeline organiza os fatos sem gerar informação nova.
-As respostas voltam por TTS.
-Se alguma camada falha, o sistema degrada função antes de perder a consulta.</a:t>
+              <a:t>[1:45–2:25]
+Os óculos fornecem áudio, câmera e interação mãos livres. No Android, o Vosk transcreve localmente, e o pipeline organiza fatos com origem verificável.
+O médico revisa o resultado, e as confirmações retornam por voz.
+O áudio usa o perfil Bluetooth de chamadas; a câmera usa o toolkit da Meta.
+O conteúdo clínico não é enviado intencionalmente para inteligência em nuvem.
+Se uma camada falhar, reduzimos a automação: preservamos o áudio, usamos o microfone do telefone ou marcamos a informação como não informada.</a:t>
             </a:r>
             <a:endParaRPr lang="en-US" dirty="0"/>
           </a:p>
@@ -962,11 +967,12 @@
           <a:p>
             <a:r>
               <a:rPr lang="en-US" dirty="0"/>
-              <a:t>Já validamos o pipeline completo no emulador Android: áudio real, transcrição, foto por voz, SOAP, atestado, criptografia e revisão.
-São 52 testes automatizados.
-Nossa equipe reúne Lucas Pacheco em Android e front-end, Marcos Paulo em inteligência artificial e Lucas Isaac em inteligência artificial, privacidade e requisitos.
-No hackathon, nossa primeira hora será dedicada a validar o HFP, a câmera DAT e a autonomia no hardware real.
-Não queremos substituir o julgamento médico. Queremos devolver ao médico tempo e atenção para o paciente.</a:t>
+              <a:t>[2:25–3:00]
+Hoje, temos 52 testes automatizados cobrindo o pipeline executado em emulador: prontuário, foto, atestado, cofre criptográfico e revisão.
+O próximo passo é validar no hardware real a voz pelos óculos, a foto pontual e a autonomia por consulta.
+Nosso diferencial combina processamento clínico local, origem verificável e decisão médica.
+Lucas Pacheco lidera Android e front-end; Marcos Paulo, inteligência artificial; e Lucas Isaac, inteligência artificial, privacidade e requisitos.
+A Medware não substitui o médico. Ela devolve tempo e atenção ao paciente.</a:t>
             </a:r>
             <a:endParaRPr lang="en-US" dirty="0"/>
           </a:p>
